--- a/docs/design-review/agent-hooks-design-review.pptx
+++ b/docs/design-review/agent-hooks-design-review.pptx
@@ -515,7 +515,7 @@
           <a:lstStyle/>
           <a:p>
             <a:r>
-              <a:t>Extracted from ACS policy-engine v0.3.1-beta. Goal: every agent framework exposes the same eight interception points; every consumer (policy, observability, audit, cost) targets one contract.</a:t>
+              <a:t>Extracted from ACS policy-engine v0.3.1-beta. Goal: every agent framework exposes the same eight interception points; every control component (policy engine, content filter, rate limiter, approval gateway, egress guard) targets one contract. Control plane only; tracing and passive observability are out of scope.</a:t>
             </a:r>
           </a:p>
         </p:txBody>
@@ -1281,7 +1281,7 @@
           <a:lstStyle/>
           <a:p>
             <a:r>
-              <a:t>Open design question RM-09: should ApprovalResolution.verdict be restricted to allow|warn so a resolver cannot inject a transform that bypasses the consumer chain?</a:t>
+              <a:t>Open design question RM-09: should ApprovalResolution.verdict be restricted to allow|warn so a resolver cannot inject a transform that bypasses the interceptor chain?</a:t>
             </a:r>
           </a:p>
         </p:txBody>
@@ -4565,7 +4565,7 @@
                 </a:solidFill>
                 <a:latin typeface="Segoe UI"/>
               </a:rPr>
-              <a:t>A framework-neutral hook contract for AI agents</a:t>
+              <a:t>A framework-neutral control contract for AI agents</a:t>
             </a:r>
           </a:p>
           <a:p>
@@ -9183,7 +9183,7 @@
                 </a:solidFill>
                 <a:latin typeface="Segoe UI"/>
               </a:rPr>
-              <a:t>    hook_error:* verdicts violate own schema</a:t>
+              <a:t>    host_error:* verdicts violate own schema</a:t>
             </a:r>
           </a:p>
           <a:p>
@@ -9831,7 +9831,7 @@
                 </a:solidFill>
                 <a:latin typeface="Segoe UI"/>
               </a:rPr>
-              <a:t>May ApprovalResolution return transform, or restrict to allow|warn so resolvers cannot bypass consumers?   [RM-09]</a:t>
+              <a:t>May ApprovalResolution return transform, or restrict to allow|warn so resolvers cannot bypass interceptors?   [RM-09]</a:t>
             </a:r>
           </a:p>
         </p:txBody>
@@ -9951,7 +9951,7 @@
                 </a:solidFill>
                 <a:latin typeface="Segoe UI"/>
               </a:rPr>
-              <a:t>Zero consumers</a:t>
+              <a:t>Zero interceptors</a:t>
             </a:r>
           </a:p>
           <a:p>
@@ -9967,7 +9967,7 @@
                 </a:solidFill>
                 <a:latin typeface="Segoe UI"/>
               </a:rPr>
-              <a:t>Implicit allow, or deny with hook_error:no_consumer?   [RM-12]</a:t>
+              <a:t>Implicit allow, or deny with host_error:no_consumer?   [RM-12]</a:t>
             </a:r>
           </a:p>
         </p:txBody>
@@ -10087,7 +10087,7 @@
                 </a:solidFill>
                 <a:latin typeface="Segoe UI"/>
               </a:rPr>
-              <a:t>Multi-consumer combine</a:t>
+              <a:t>Multi-interceptor combine</a:t>
             </a:r>
           </a:p>
           <a:p>
@@ -10223,7 +10223,7 @@
                 </a:solidFill>
                 <a:latin typeface="Segoe UI"/>
               </a:rPr>
-              <a:t>Consumer trust roles</a:t>
+              <a:t>Interceptor trust roles</a:t>
             </a:r>
           </a:p>
           <a:p>
@@ -10239,7 +10239,7 @@
                 </a:solidFill>
                 <a:latin typeface="Segoe UI"/>
               </a:rPr>
-              <a:t>All consumers one trust class, or define observing vs controlling at registration?   [RM-29]</a:t>
+              <a:t>All interceptors one trust class, or define observing vs controlling at registration?   [RM-29]</a:t>
             </a:r>
           </a:p>
         </p:txBody>
@@ -10817,7 +10817,7 @@
                 </a:solidFill>
                 <a:latin typeface="Segoe UI"/>
               </a:rPr>
-              <a:t>RM-08 schema fix for hook_error:*</a:t>
+              <a:t>RM-08 schema fix for host_error:*</a:t>
             </a:r>
           </a:p>
           <a:p>
@@ -11027,7 +11027,7 @@
                 </a:solidFill>
                 <a:latin typeface="Segoe UI"/>
               </a:rPr>
-              <a:t>RM-29 consumer trust roles</a:t>
+              <a:t>RM-29 interceptor trust roles</a:t>
             </a:r>
           </a:p>
           <a:p>
@@ -11043,7 +11043,7 @@
                 </a:solidFill>
                 <a:latin typeface="Segoe UI"/>
               </a:rPr>
-              <a:t>RM-34 per-consumer verdict provenance</a:t>
+              <a:t>RM-34 per-interceptor verdict provenance</a:t>
             </a:r>
           </a:p>
           <a:p>
@@ -11521,7 +11521,7 @@
                 </a:solidFill>
                 <a:latin typeface="Segoe UI"/>
               </a:rPr>
-              <a:t>      Verdict and approval seam in agent-hooks vs ACS; identity computed over HookContext not PolicyInput.</a:t>
+              <a:t>      Verdict and approval seam in agent-hooks vs ACS; identity computed over AgentContext not PolicyInput.</a:t>
             </a:r>
           </a:p>
           <a:p>
@@ -11798,7 +11798,7 @@
                 </a:solidFill>
                 <a:latin typeface="Segoe UI"/>
               </a:rPr>
-              <a:t>Every framework x every consumer = bespoke adapter</a:t>
+              <a:t>Every framework x every control = bespoke adapter</a:t>
             </a:r>
           </a:p>
           <a:p>
@@ -11814,7 +11814,7 @@
                 </a:solidFill>
                 <a:latin typeface="Segoe UI"/>
               </a:rPr>
-              <a:t>Surveyed 7 framework integrations in AGT: no shared base, divergent payloads, uneven hook coverage</a:t>
+              <a:t>Surveyed 7 framework integrations in AGT: no shared base, divergent payloads, uneven interception-point coverage</a:t>
             </a:r>
           </a:p>
         </p:txBody>
@@ -12407,7 +12407,7 @@
                 </a:solidFill>
                 <a:latin typeface="Segoe UI"/>
               </a:rPr>
-              <a:t>OTel tracing</a:t>
+              <a:t>Content filter</a:t>
             </a:r>
           </a:p>
         </p:txBody>
@@ -12468,7 +12468,7 @@
                 </a:solidFill>
                 <a:latin typeface="Segoe UI"/>
               </a:rPr>
-              <a:t>Audit log</a:t>
+              <a:t>Rate limiter</a:t>
             </a:r>
           </a:p>
         </p:txBody>
@@ -12529,7 +12529,7 @@
                 </a:solidFill>
                 <a:latin typeface="Segoe UI"/>
               </a:rPr>
-              <a:t>Cost tracker</a:t>
+              <a:t>Approval gateway</a:t>
             </a:r>
           </a:p>
         </p:txBody>
@@ -12590,7 +12590,7 @@
                 </a:solidFill>
                 <a:latin typeface="Segoe UI"/>
               </a:rPr>
-              <a:t>Content filter</a:t>
+              <a:t>Egress guard</a:t>
             </a:r>
           </a:p>
         </p:txBody>
@@ -14030,7 +14030,7 @@
                 </a:solidFill>
                 <a:latin typeface="Segoe UI"/>
               </a:rPr>
-              <a:t>agent-hooks is the wire contract; ACS becomes one consumer</a:t>
+              <a:t>agent-hooks is the wire contract; ACS becomes one interceptor</a:t>
             </a:r>
           </a:p>
           <a:p>
@@ -14046,7 +14046,7 @@
                 </a:solidFill>
                 <a:latin typeface="Segoe UI"/>
               </a:rPr>
-              <a:t>Frameworks emit HookContext; consumers return Verdict; host enforces</a:t>
+              <a:t>Frameworks emit AgentContext; interceptors return Verdict; host enforces</a:t>
             </a:r>
           </a:p>
         </p:txBody>
@@ -14853,7 +14853,7 @@
                 </a:solidFill>
                 <a:latin typeface="Segoe UI"/>
               </a:rPr>
-              <a:t>HookPoint  ·  HookContext  ·  Verdict  ·  host obligations  ·  approval seam  ·  context_identity  ·  CTK</a:t>
+              <a:t>InterceptionPoint  ·  AgentContext  ·  Verdict  ·  host obligations  ·  approval seam  ·  context_identity  ·  CTK</a:t>
             </a:r>
           </a:p>
         </p:txBody>
@@ -14910,7 +14910,7 @@
                 </a:solidFill>
                 <a:latin typeface="Segoe UI"/>
               </a:rPr>
-              <a:t>HookContext ↓</a:t>
+              <a:t>AgentContext ↓</a:t>
             </a:r>
           </a:p>
         </p:txBody>
@@ -15126,7 +15126,7 @@
                 </a:solidFill>
                 <a:latin typeface="Segoe UI"/>
               </a:rPr>
-              <a:t>OTel tracing</a:t>
+              <a:t>Content filter</a:t>
             </a:r>
           </a:p>
         </p:txBody>
@@ -15224,7 +15224,7 @@
                 </a:solidFill>
                 <a:latin typeface="Segoe UI"/>
               </a:rPr>
-              <a:t>Audit log</a:t>
+              <a:t>Rate limiter</a:t>
             </a:r>
           </a:p>
         </p:txBody>
@@ -15322,7 +15322,7 @@
                 </a:solidFill>
                 <a:latin typeface="Segoe UI"/>
               </a:rPr>
-              <a:t>Cost tracker</a:t>
+              <a:t>Approval gateway</a:t>
             </a:r>
           </a:p>
         </p:txBody>
@@ -15420,7 +15420,7 @@
                 </a:solidFill>
                 <a:latin typeface="Segoe UI"/>
               </a:rPr>
-              <a:t>Content filter</a:t>
+              <a:t>Egress guard</a:t>
             </a:r>
           </a:p>
         </p:txBody>
@@ -15672,7 +15672,7 @@
                 </a:solidFill>
                 <a:latin typeface="Segoe UI"/>
               </a:rPr>
-              <a:t>Eight hook points on the agent loop</a:t>
+              <a:t>Eight interception points on the agent loop</a:t>
             </a:r>
           </a:p>
           <a:p>
@@ -17343,7 +17343,7 @@
                 </a:solidFill>
                 <a:latin typeface="Segoe UI"/>
               </a:rPr>
-              <a:t>HookContext: tiered schema with an explicit $target</a:t>
+              <a:t>AgentContext: tiered schema with an explicit $target</a:t>
             </a:r>
           </a:p>
           <a:p>
@@ -17696,7 +17696,7 @@
                 </a:solidFill>
                 <a:latin typeface="Segoe UI"/>
               </a:rPr>
-              <a:t>L1  per-hook required</a:t>
+              <a:t>L1  per-point required</a:t>
             </a:r>
           </a:p>
           <a:p>
@@ -17815,7 +17815,7 @@
                 </a:solidFill>
                 <a:latin typeface="Segoe UI"/>
               </a:rPr>
-              <a:t>spec, hook_point, timestamp, sequence, agent.{id,framework}, session.id, target</a:t>
+              <a:t>spec, interception_point, timestamp, sequence, agent.{id,framework}, session.id, target</a:t>
             </a:r>
           </a:p>
         </p:txBody>
@@ -19629,7 +19629,7 @@
                 </a:solidFill>
                 <a:latin typeface="Segoe UI"/>
               </a:rPr>
-              <a:t>§6.2: when a pre_X hook blocks, post_X is NOT emitted. §6.3: any failure (consumer raised, timeout, invalid verdict) fails closed to deny with a hook_error:* reason.</a:t>
+              <a:t>§6.2: when a pre_X interception blocks, post_X is NOT emitted. §6.3: any failure (interceptor raised, timeout, invalid verdict) fails closed to deny with a host_error:* reason.</a:t>
             </a:r>
           </a:p>
         </p:txBody>
@@ -19999,7 +19999,7 @@
                 </a:solidFill>
                 <a:latin typeface="Segoe UI"/>
               </a:rPr>
-              <a:t>Consumer</a:t>
+              <a:t>Interceptor</a:t>
             </a:r>
           </a:p>
         </p:txBody>
@@ -20319,7 +20319,7 @@
                 </a:solidFill>
                 <a:latin typeface="Cascadia Mono"/>
               </a:rPr>
-              <a:t>on_hook(ctx)  id=sha256(L0+L1)</a:t>
+              <a:t>intercept(ctx)  id=sha256(L0+L1)</a:t>
             </a:r>
           </a:p>
         </p:txBody>
@@ -20815,7 +20815,7 @@
                 </a:solidFill>
                 <a:latin typeface="Cascadia Mono"/>
               </a:rPr>
-              <a:t>reject / unresolved / id mismatch  →  deny (hook_error:approval_*)</a:t>
+              <a:t>reject / unresolved / id mismatch  →  deny (host_error:approval_*)</a:t>
             </a:r>
           </a:p>
         </p:txBody>
@@ -21204,7 +21204,7 @@
                 </a:solidFill>
                 <a:latin typeface="Cascadia Mono"/>
               </a:rPr>
-              <a:t>spec, hook_point, timestamp, sequence</a:t>
+              <a:t>spec, interception_point, timestamp, sequence</a:t>
             </a:r>
           </a:p>
         </p:txBody>
@@ -21546,7 +21546,7 @@
                 </a:solidFill>
                 <a:latin typeface="Cascadia Mono"/>
               </a:rPr>
-              <a:t>target  +  L1 fields for this hook_point</a:t>
+              <a:t>target  +  L1 fields for this interception_point</a:t>
             </a:r>
           </a:p>
         </p:txBody>
@@ -22651,7 +22651,7 @@
                 </a:solidFill>
                 <a:latin typeface="Segoe UI"/>
               </a:rPr>
-              <a:t>Level 1  Observing</a:t>
+              <a:t>Level 1  Instrumented</a:t>
             </a:r>
           </a:p>
           <a:p>
@@ -22667,7 +22667,7 @@
                 </a:solidFill>
                 <a:latin typeface="Segoe UI"/>
               </a:rPr>
-              <a:t>all hooks fire in order with valid L0+L1 context</a:t>
+              <a:t>all interception points fire in order with valid L0+L1 context</a:t>
             </a:r>
           </a:p>
         </p:txBody>
@@ -22753,7 +22753,7 @@
                 </a:solidFill>
                 <a:latin typeface="Segoe UI"/>
               </a:rPr>
-              <a:t>scenario + consumer_script + expect</a:t>
+              <a:t>scenario + interceptor_script + expect</a:t>
             </a:r>
           </a:p>
         </p:txBody>
@@ -22876,7 +22876,7 @@
                 </a:solidFill>
                 <a:latin typeface="Segoe UI"/>
               </a:rPr>
-              <a:t>ScriptedConsumer + RecordingConsumer</a:t>
+              <a:t>ScriptedInterceptor + RecordingInterceptor</a:t>
             </a:r>
           </a:p>
         </p:txBody>

--- a/docs/design-review/agent-hooks-design-review.pptx
+++ b/docs/design-review/agent-hooks-design-review.pptx
@@ -22455,83 +22455,8 @@
         </p:nvSpPr>
         <p:spPr>
           <a:xfrm>
-            <a:off x="1737360" y="2011680"/>
-            <a:ext cx="2560320" cy="1005840"/>
-          </a:xfrm>
-          <a:prstGeom prst="roundRect">
-            <a:avLst>
-              <a:gd name="adj" fmla="val 8000"/>
-            </a:avLst>
-          </a:prstGeom>
-          <a:solidFill>
-            <a:srgbClr val="00B7C3"/>
-          </a:solidFill>
-          <a:ln>
-            <a:noFill/>
-          </a:ln>
-          <a:effectLst/>
-        </p:spPr>
-        <p:style>
-          <a:lnRef idx="1">
-            <a:schemeClr val="accent1"/>
-          </a:lnRef>
-          <a:fillRef idx="3">
-            <a:schemeClr val="accent1"/>
-          </a:fillRef>
-          <a:effectRef idx="2">
-            <a:schemeClr val="accent1"/>
-          </a:effectRef>
-          <a:fontRef idx="minor">
-            <a:schemeClr val="lt1"/>
-          </a:fontRef>
-        </p:style>
-        <p:txBody>
-          <a:bodyPr rtlCol="0" anchor="ctr" wrap="square"/>
-          <a:lstStyle/>
-          <a:p>
-            <a:pPr algn="ctr">
-              <a:spcAft>
-                <a:spcPts val="200"/>
-              </a:spcAft>
-            </a:pPr>
-            <a:r>
-              <a:rPr sz="1200" b="1" i="0">
-                <a:solidFill>
-                  <a:srgbClr val="FFFFFF"/>
-                </a:solidFill>
-                <a:latin typeface="Segoe UI"/>
-              </a:rPr>
-              <a:t>Level 3  Complete</a:t>
-            </a:r>
-          </a:p>
-          <a:p>
-            <a:pPr algn="ctr">
-              <a:spcAft>
-                <a:spcPts val="200"/>
-              </a:spcAft>
-            </a:pPr>
-            <a:r>
-              <a:rPr sz="800" b="0" i="0">
-                <a:solidFill>
-                  <a:srgbClr val="E8E8E8"/>
-                </a:solidFill>
-                <a:latin typeface="Segoe UI"/>
-              </a:rPr>
-              <a:t>L2 fields, result_labels propagation, parallel/streaming, stable identity</a:t>
-            </a:r>
-          </a:p>
-        </p:txBody>
-      </p:sp>
-      <p:sp>
-        <p:nvSpPr>
-          <p:cNvPr id="6" name="Rounded Rectangle 5"/>
-          <p:cNvSpPr/>
-          <p:nvPr/>
-        </p:nvSpPr>
-        <p:spPr>
-          <a:xfrm>
-            <a:off x="1325880" y="3154680"/>
-            <a:ext cx="3383279" cy="1005840"/>
+            <a:off x="914400" y="2194560"/>
+            <a:ext cx="4206240" cy="1188720"/>
           </a:xfrm>
           <a:prstGeom prst="roundRect">
             <a:avLst>
@@ -22570,13 +22495,13 @@
               </a:spcAft>
             </a:pPr>
             <a:r>
-              <a:rPr sz="1200" b="1" i="0">
+              <a:rPr sz="1600" b="1" i="0">
                 <a:solidFill>
                   <a:srgbClr val="FFFFFF"/>
                 </a:solidFill>
                 <a:latin typeface="Segoe UI"/>
               </a:rPr>
-              <a:t>Level 2  Enforcing</a:t>
+              <a:t>CONFORMANT</a:t>
             </a:r>
           </a:p>
           <a:p>
@@ -22586,13 +22511,148 @@
               </a:spcAft>
             </a:pPr>
             <a:r>
-              <a:rPr sz="800" b="0" i="0">
+              <a:rPr sz="900" b="0" i="0">
                 <a:solidFill>
                   <a:srgbClr val="E8E8E8"/>
                 </a:solidFill>
                 <a:latin typeface="Segoe UI"/>
               </a:rPr>
-              <a:t>honours deny / transform / escalate / evaluate_only</a:t>
+              <a:t>passes 100% of vectors applicable to declared capabilities — emission + enforcement, one bar, no tiers</a:t>
+            </a:r>
+          </a:p>
+        </p:txBody>
+      </p:sp>
+      <p:sp>
+        <p:nvSpPr>
+          <p:cNvPr id="6" name="TextBox 5"/>
+          <p:cNvSpPr txBox="1"/>
+          <p:nvPr/>
+        </p:nvSpPr>
+        <p:spPr>
+          <a:xfrm>
+            <a:off x="914400" y="3611880"/>
+            <a:ext cx="4206240" cy="2194560"/>
+          </a:xfrm>
+          <a:prstGeom prst="rect">
+            <a:avLst/>
+          </a:prstGeom>
+          <a:noFill/>
+        </p:spPr>
+        <p:txBody>
+          <a:bodyPr wrap="square">
+            <a:spAutoFit/>
+          </a:bodyPr>
+          <a:lstStyle/>
+          <a:p>
+            <a:pPr>
+              <a:spcAft>
+                <a:spcPts val="200"/>
+              </a:spcAft>
+            </a:pPr>
+            <a:r>
+              <a:rPr sz="1100" b="1" i="0">
+                <a:solidFill>
+                  <a:srgbClr val="102A43"/>
+                </a:solidFill>
+                <a:latin typeface="Segoe UI"/>
+              </a:rPr>
+              <a:t>Capability gating (§3.2):</a:t>
+            </a:r>
+          </a:p>
+          <a:p>
+            <a:pPr>
+              <a:spcAft>
+                <a:spcPts val="100"/>
+              </a:spcAft>
+            </a:pPr>
+            <a:r>
+              <a:rPr sz="1000" b="0" i="0">
+                <a:solidFill>
+                  <a:srgbClr val="4A4A55"/>
+                </a:solidFill>
+                <a:latin typeface="Cascadia Mono"/>
+              </a:rPr>
+              <a:t>  model_calls</a:t>
+            </a:r>
+          </a:p>
+          <a:p>
+            <a:pPr>
+              <a:spcAft>
+                <a:spcPts val="100"/>
+              </a:spcAft>
+            </a:pPr>
+            <a:r>
+              <a:rPr sz="1000" b="0" i="0">
+                <a:solidFill>
+                  <a:srgbClr val="4A4A55"/>
+                </a:solidFill>
+                <a:latin typeface="Cascadia Mono"/>
+              </a:rPr>
+              <a:t>  tool_calls</a:t>
+            </a:r>
+          </a:p>
+          <a:p>
+            <a:pPr>
+              <a:spcAft>
+                <a:spcPts val="100"/>
+              </a:spcAft>
+            </a:pPr>
+            <a:r>
+              <a:rPr sz="1000" b="0" i="0">
+                <a:solidFill>
+                  <a:srgbClr val="4A4A55"/>
+                </a:solidFill>
+                <a:latin typeface="Cascadia Mono"/>
+              </a:rPr>
+              <a:t>  parallel_tool_calls</a:t>
+            </a:r>
+          </a:p>
+          <a:p>
+            <a:pPr>
+              <a:spcAft>
+                <a:spcPts val="100"/>
+              </a:spcAft>
+            </a:pPr>
+            <a:r>
+              <a:rPr sz="1000" b="0" i="0">
+                <a:solidFill>
+                  <a:srgbClr val="4A4A55"/>
+                </a:solidFill>
+                <a:latin typeface="Cascadia Mono"/>
+              </a:rPr>
+              <a:t>  streaming</a:t>
+            </a:r>
+          </a:p>
+          <a:p>
+            <a:pPr>
+              <a:spcAft>
+                <a:spcPts val="100"/>
+              </a:spcAft>
+            </a:pPr>
+            <a:r>
+              <a:rPr sz="1000" b="0" i="0">
+                <a:solidFill>
+                  <a:srgbClr val="4A4A55"/>
+                </a:solidFill>
+                <a:latin typeface="Cascadia Mono"/>
+              </a:rPr>
+              <a:t>  multi_turn</a:t>
+            </a:r>
+          </a:p>
+          <a:p>
+            <a:pPr>
+              <a:spcAft>
+                <a:spcPts val="200"/>
+              </a:spcAft>
+            </a:pPr>
+            <a:r>
+              <a:rPr sz="900" b="0" i="1">
+                <a:solidFill>
+                  <a:srgbClr val="CA5A00"/>
+                </a:solidFill>
+                <a:latin typeface="Segoe UI"/>
+              </a:rPr>
+              <a:t>Not a security certification (SECURITY.md, §1.4).</a:t>
             </a:r>
           </a:p>
         </p:txBody>
@@ -22600,81 +22660,6 @@
       <p:sp>
         <p:nvSpPr>
           <p:cNvPr id="7" name="Rounded Rectangle 6"/>
-          <p:cNvSpPr/>
-          <p:nvPr/>
-        </p:nvSpPr>
-        <p:spPr>
-          <a:xfrm>
-            <a:off x="914400" y="4297680"/>
-            <a:ext cx="4206240" cy="1005840"/>
-          </a:xfrm>
-          <a:prstGeom prst="roundRect">
-            <a:avLst>
-              <a:gd name="adj" fmla="val 8000"/>
-            </a:avLst>
-          </a:prstGeom>
-          <a:solidFill>
-            <a:srgbClr val="4A4A55"/>
-          </a:solidFill>
-          <a:ln>
-            <a:noFill/>
-          </a:ln>
-          <a:effectLst/>
-        </p:spPr>
-        <p:style>
-          <a:lnRef idx="1">
-            <a:schemeClr val="accent1"/>
-          </a:lnRef>
-          <a:fillRef idx="3">
-            <a:schemeClr val="accent1"/>
-          </a:fillRef>
-          <a:effectRef idx="2">
-            <a:schemeClr val="accent1"/>
-          </a:effectRef>
-          <a:fontRef idx="minor">
-            <a:schemeClr val="lt1"/>
-          </a:fontRef>
-        </p:style>
-        <p:txBody>
-          <a:bodyPr rtlCol="0" anchor="ctr" wrap="square"/>
-          <a:lstStyle/>
-          <a:p>
-            <a:pPr algn="ctr">
-              <a:spcAft>
-                <a:spcPts val="200"/>
-              </a:spcAft>
-            </a:pPr>
-            <a:r>
-              <a:rPr sz="1200" b="1" i="0">
-                <a:solidFill>
-                  <a:srgbClr val="FFFFFF"/>
-                </a:solidFill>
-                <a:latin typeface="Segoe UI"/>
-              </a:rPr>
-              <a:t>Level 1  Instrumented</a:t>
-            </a:r>
-          </a:p>
-          <a:p>
-            <a:pPr algn="ctr">
-              <a:spcAft>
-                <a:spcPts val="200"/>
-              </a:spcAft>
-            </a:pPr>
-            <a:r>
-              <a:rPr sz="800" b="0" i="0">
-                <a:solidFill>
-                  <a:srgbClr val="E8E8E8"/>
-                </a:solidFill>
-                <a:latin typeface="Segoe UI"/>
-              </a:rPr>
-              <a:t>all interception points fire in order with valid L0+L1 context</a:t>
-            </a:r>
-          </a:p>
-        </p:txBody>
-      </p:sp>
-      <p:sp>
-        <p:nvSpPr>
-          <p:cNvPr id="8" name="Rounded Rectangle 7"/>
           <p:cNvSpPr/>
           <p:nvPr/>
         </p:nvSpPr>
@@ -22760,7 +22745,7 @@
       </p:sp>
       <p:cxnSp>
         <p:nvCxnSpPr>
-          <p:cNvPr id="9" name="Connector 8"/>
+          <p:cNvPr id="8" name="Connector 7"/>
           <p:cNvCxnSpPr/>
           <p:nvPr/>
         </p:nvCxnSpPr>
@@ -22797,7 +22782,7 @@
       </p:cxnSp>
       <p:sp>
         <p:nvSpPr>
-          <p:cNvPr id="10" name="Rounded Rectangle 9"/>
+          <p:cNvPr id="9" name="Rounded Rectangle 8"/>
           <p:cNvSpPr/>
           <p:nvPr/>
         </p:nvSpPr>
@@ -22883,7 +22868,7 @@
       </p:sp>
       <p:cxnSp>
         <p:nvCxnSpPr>
-          <p:cNvPr id="11" name="Connector 10"/>
+          <p:cNvPr id="10" name="Connector 9"/>
           <p:cNvCxnSpPr/>
           <p:nvPr/>
         </p:nvCxnSpPr>
@@ -22920,7 +22905,7 @@
       </p:cxnSp>
       <p:sp>
         <p:nvSpPr>
-          <p:cNvPr id="12" name="Rounded Rectangle 11"/>
+          <p:cNvPr id="11" name="Rounded Rectangle 10"/>
           <p:cNvSpPr/>
           <p:nvPr/>
         </p:nvSpPr>
@@ -23006,7 +22991,7 @@
       </p:sp>
       <p:cxnSp>
         <p:nvCxnSpPr>
-          <p:cNvPr id="13" name="Connector 12"/>
+          <p:cNvPr id="12" name="Connector 11"/>
           <p:cNvCxnSpPr/>
           <p:nvPr/>
         </p:nvCxnSpPr>
@@ -23043,7 +23028,7 @@
       </p:cxnSp>
       <p:sp>
         <p:nvSpPr>
-          <p:cNvPr id="14" name="Rounded Rectangle 13"/>
+          <p:cNvPr id="13" name="Rounded Rectangle 12"/>
           <p:cNvSpPr/>
           <p:nvPr/>
         </p:nvSpPr>
@@ -23129,7 +23114,7 @@
       </p:sp>
       <p:sp>
         <p:nvSpPr>
-          <p:cNvPr id="15" name="Rounded Rectangle 14"/>
+          <p:cNvPr id="14" name="Rounded Rectangle 13"/>
           <p:cNvSpPr/>
           <p:nvPr/>
         </p:nvSpPr>
@@ -23175,18 +23160,18 @@
             <a:r>
               <a:rPr sz="900" b="0" i="0">
                 <a:solidFill>
-                  <a:srgbClr val="C50F1F"/>
-                </a:solidFill>
-                <a:latin typeface="Segoe UI"/>
-              </a:rPr>
-              <a:t>14 vectors today (L1+L2). RM-01 (critical): negative-path / fail-closed vectors missing.</a:t>
-            </a:r>
-          </a:p>
-        </p:txBody>
-      </p:sp>
-      <p:sp>
-        <p:nvSpPr>
-          <p:cNvPr id="16" name="TextBox 15"/>
+                  <a:srgbClr val="4A4A55"/>
+                </a:solidFill>
+                <a:latin typeface="Segoe UI"/>
+              </a:rPr>
+              <a:t>16 vectors incl. fold-through and zero-interceptor fail-closed.</a:t>
+            </a:r>
+          </a:p>
+        </p:txBody>
+      </p:sp>
+      <p:sp>
+        <p:nvSpPr>
+          <p:cNvPr id="15" name="TextBox 14"/>
           <p:cNvSpPr txBox="1"/>
           <p:nvPr/>
         </p:nvSpPr>
